--- a/docs/ATDRPS_SIH26153.pptx
+++ b/docs/ATDRPS_SIH26153.pptx
@@ -229,19 +229,19 @@
                 <c:formatCode>General</c:formatCode>
                 <c:ptCount val="5"/>
                 <c:pt idx="0">
-                  <c:v>0.9023</c:v>
+                  <c:v>0.8376</c:v>
                 </c:pt>
                 <c:pt idx="1">
-                  <c:v>0.8989</c:v>
+                  <c:v>0.832</c:v>
                 </c:pt>
                 <c:pt idx="2">
-                  <c:v>0.8934</c:v>
+                  <c:v>0.8206</c:v>
                 </c:pt>
                 <c:pt idx="3">
-                  <c:v>0.8811</c:v>
+                  <c:v>0.8129</c:v>
                 </c:pt>
                 <c:pt idx="4">
-                  <c:v>0.8678</c:v>
+                  <c:v>0.8048</c:v>
                 </c:pt>
               </c:numCache>
             </c:numRef>
@@ -324,19 +324,19 @@
                 <c:formatCode>General</c:formatCode>
                 <c:ptCount val="5"/>
                 <c:pt idx="0">
-                  <c:v>0.9375</c:v>
+                  <c:v>0.8947</c:v>
                 </c:pt>
                 <c:pt idx="1">
-                  <c:v>0.9179</c:v>
+                  <c:v>0.8671</c:v>
                 </c:pt>
                 <c:pt idx="2">
-                  <c:v>0.9013</c:v>
+                  <c:v>0.8353</c:v>
                 </c:pt>
                 <c:pt idx="3">
-                  <c:v>0.8842</c:v>
+                  <c:v>0.8191</c:v>
                 </c:pt>
                 <c:pt idx="4">
-                  <c:v>0.8684</c:v>
+                  <c:v>0.8113</c:v>
                 </c:pt>
               </c:numCache>
             </c:numRef>
@@ -419,19 +419,19 @@
                 <c:formatCode>General</c:formatCode>
                 <c:ptCount val="5"/>
                 <c:pt idx="0">
-                  <c:v>0.9562</c:v>
+                  <c:v>0.9214</c:v>
                 </c:pt>
                 <c:pt idx="1">
-                  <c:v>0.9435</c:v>
+                  <c:v>0.9009</c:v>
                 </c:pt>
                 <c:pt idx="2">
-                  <c:v>0.9312</c:v>
+                  <c:v>0.8631</c:v>
                 </c:pt>
                 <c:pt idx="3">
-                  <c:v>0.9175</c:v>
+                  <c:v>0.8499</c:v>
                 </c:pt>
                 <c:pt idx="4">
-                  <c:v>0.9049</c:v>
+                  <c:v>0.8419</c:v>
                 </c:pt>
               </c:numCache>
             </c:numRef>
@@ -513,7 +513,7 @@
         <c:scaling>
           <c:orientation val="minMax"/>
           <c:max val="1"/>
-          <c:min val="0.8"/>
+          <c:min val="0.75"/>
         </c:scaling>
         <c:delete val="0"/>
         <c:axPos val="l"/>
@@ -3635,7 +3635,7 @@
                 <a:ea typeface="Calibri" pitchFamily="34" charset="-122"/>
                 <a:cs typeface="Calibri" pitchFamily="34" charset="-120"/>
               </a:rPr>
-              <a:t>96-dim vector</a:t>
+              <a:t>103-dim vector</a:t>
             </a:r>
             <a:endParaRPr lang="en-US" sz="1100" dirty="0"/>
           </a:p>
@@ -3770,11 +3770,12 @@
             <a:endParaRPr lang="en-US" sz="1150" dirty="0"/>
           </a:p>
           <a:p>
-            <a:pPr indent="0" marL="0">
+            <a:pPr marL="342900" indent="-342900">
               <a:spcAft>
                 <a:spcPts val="1000"/>
               </a:spcAft>
-              <a:buNone/>
+              <a:buSzPct val="100000"/>
+              <a:buChar char="•"/>
             </a:pPr>
             <a:r>
               <a:rPr lang="en-US" sz="1150" dirty="0">
@@ -3785,7 +3786,7 @@
                 <a:ea typeface="Calibri" pitchFamily="34" charset="-122"/>
                 <a:cs typeface="Calibri" pitchFamily="34" charset="-120"/>
               </a:rPr>
-              <a:t>Behavioural detectors (14) — ports swept per pair, beacon regularity, internal peers reached, never-before-seen destinations</a:t>
+              <a:t>Behavioural detectors (21) — ports swept per pair, beacon regularity, worm fan-out, half-open ratio, DNS query size, TTL inconsistency</a:t>
             </a:r>
             <a:endParaRPr lang="en-US" sz="1150" dirty="0"/>
           </a:p>
@@ -3982,7 +3983,7 @@
         </p:nvSpPr>
         <p:spPr>
           <a:xfrm>
-            <a:off x="6675120" y="4169664"/>
+            <a:off x="6675120" y="4041648"/>
             <a:ext cx="2011680" cy="274320"/>
           </a:xfrm>
           <a:prstGeom prst="rect">
@@ -4021,7 +4022,7 @@
         </p:nvSpPr>
         <p:spPr>
           <a:xfrm>
-            <a:off x="8732520" y="4169664"/>
+            <a:off x="8732520" y="4041648"/>
             <a:ext cx="731520" cy="274320"/>
           </a:xfrm>
           <a:prstGeom prst="rect">
@@ -4060,7 +4061,7 @@
         </p:nvSpPr>
         <p:spPr>
           <a:xfrm>
-            <a:off x="9555480" y="4169664"/>
+            <a:off x="9555480" y="4041648"/>
             <a:ext cx="731520" cy="274320"/>
           </a:xfrm>
           <a:prstGeom prst="rect">
@@ -4099,7 +4100,7 @@
         </p:nvSpPr>
         <p:spPr>
           <a:xfrm>
-            <a:off x="10424160" y="4169664"/>
+            <a:off x="10424160" y="4041648"/>
             <a:ext cx="1097280" cy="274320"/>
           </a:xfrm>
           <a:prstGeom prst="rect">
@@ -4124,7 +4125,7 @@
                 <a:ea typeface="Calibri" pitchFamily="34" charset="-122"/>
                 <a:cs typeface="Calibri" pitchFamily="34" charset="-120"/>
               </a:rPr>
-              <a:t>Recon</a:t>
+              <a:t>port scan</a:t>
             </a:r>
             <a:endParaRPr lang="en-US" sz="950" dirty="0"/>
           </a:p>
@@ -4138,7 +4139,7 @@
         </p:nvSpPr>
         <p:spPr>
           <a:xfrm>
-            <a:off x="6675120" y="4590288"/>
+            <a:off x="6675120" y="4343400"/>
             <a:ext cx="2011680" cy="274320"/>
           </a:xfrm>
           <a:prstGeom prst="rect">
@@ -4163,7 +4164,7 @@
                 <a:ea typeface="Calibri" pitchFamily="34" charset="-122"/>
                 <a:cs typeface="Calibri" pitchFamily="34" charset="-120"/>
               </a:rPr>
-              <a:t>admin service share</a:t>
+              <a:t>same-port fan-out</a:t>
             </a:r>
             <a:endParaRPr lang="en-US" sz="1050" dirty="0"/>
           </a:p>
@@ -4177,7 +4178,7 @@
         </p:nvSpPr>
         <p:spPr>
           <a:xfrm>
-            <a:off x="8732520" y="4590288"/>
+            <a:off x="8732520" y="4343400"/>
             <a:ext cx="731520" cy="274320"/>
           </a:xfrm>
           <a:prstGeom prst="rect">
@@ -4202,7 +4203,7 @@
                 <a:ea typeface="Courier New" pitchFamily="34" charset="-122"/>
                 <a:cs typeface="Courier New" pitchFamily="34" charset="-120"/>
               </a:rPr>
-              <a:t>0.00</a:t>
+              <a:t>0.79</a:t>
             </a:r>
             <a:endParaRPr lang="en-US" sz="1100" dirty="0"/>
           </a:p>
@@ -4216,7 +4217,7 @@
         </p:nvSpPr>
         <p:spPr>
           <a:xfrm>
-            <a:off x="9555480" y="4590288"/>
+            <a:off x="9555480" y="4343400"/>
             <a:ext cx="731520" cy="274320"/>
           </a:xfrm>
           <a:prstGeom prst="rect">
@@ -4235,13 +4236,13 @@
             <a:r>
               <a:rPr lang="en-US" sz="1100" b="1" dirty="0">
                 <a:solidFill>
-                  <a:srgbClr val="D29922"/>
+                  <a:srgbClr val="DB6D28"/>
                 </a:solidFill>
                 <a:latin typeface="Courier New" pitchFamily="34" charset="0"/>
                 <a:ea typeface="Courier New" pitchFamily="34" charset="-122"/>
                 <a:cs typeface="Courier New" pitchFamily="34" charset="-120"/>
               </a:rPr>
-              <a:t>0.36</a:t>
+              <a:t>1.89</a:t>
             </a:r>
             <a:endParaRPr lang="en-US" sz="1100" dirty="0"/>
           </a:p>
@@ -4255,7 +4256,7 @@
         </p:nvSpPr>
         <p:spPr>
           <a:xfrm>
-            <a:off x="10424160" y="4590288"/>
+            <a:off x="10424160" y="4343400"/>
             <a:ext cx="1097280" cy="274320"/>
           </a:xfrm>
           <a:prstGeom prst="rect">
@@ -4280,7 +4281,7 @@
                 <a:ea typeface="Calibri" pitchFamily="34" charset="-122"/>
                 <a:cs typeface="Calibri" pitchFamily="34" charset="-120"/>
               </a:rPr>
-              <a:t>Initial Access</a:t>
+              <a:t>worm</a:t>
             </a:r>
             <a:endParaRPr lang="en-US" sz="950" dirty="0"/>
           </a:p>
@@ -4294,7 +4295,7 @@
         </p:nvSpPr>
         <p:spPr>
           <a:xfrm>
-            <a:off x="6675120" y="5010912"/>
+            <a:off x="6675120" y="4645152"/>
             <a:ext cx="2011680" cy="274320"/>
           </a:xfrm>
           <a:prstGeom prst="rect">
@@ -4319,7 +4320,7 @@
                 <a:ea typeface="Calibri" pitchFamily="34" charset="-122"/>
                 <a:cs typeface="Calibri" pitchFamily="34" charset="-120"/>
               </a:rPr>
-              <a:t>beacon regularity</a:t>
+              <a:t>half-open ratio</a:t>
             </a:r>
             <a:endParaRPr lang="en-US" sz="1050" dirty="0"/>
           </a:p>
@@ -4333,7 +4334,7 @@
         </p:nvSpPr>
         <p:spPr>
           <a:xfrm>
-            <a:off x="8732520" y="5010912"/>
+            <a:off x="8732520" y="4645152"/>
             <a:ext cx="731520" cy="274320"/>
           </a:xfrm>
           <a:prstGeom prst="rect">
@@ -4358,7 +4359,7 @@
                 <a:ea typeface="Courier New" pitchFamily="34" charset="-122"/>
                 <a:cs typeface="Courier New" pitchFamily="34" charset="-120"/>
               </a:rPr>
-              <a:t>0.66</a:t>
+              <a:t>0.00</a:t>
             </a:r>
             <a:endParaRPr lang="en-US" sz="1100" dirty="0"/>
           </a:p>
@@ -4372,7 +4373,7 @@
         </p:nvSpPr>
         <p:spPr>
           <a:xfrm>
-            <a:off x="9555480" y="5010912"/>
+            <a:off x="9555480" y="4645152"/>
             <a:ext cx="731520" cy="274320"/>
           </a:xfrm>
           <a:prstGeom prst="rect">
@@ -4391,13 +4392,13 @@
             <a:r>
               <a:rPr lang="en-US" sz="1100" b="1" dirty="0">
                 <a:solidFill>
-                  <a:srgbClr val="BC8CFF"/>
+                  <a:srgbClr val="F85149"/>
                 </a:solidFill>
                 <a:latin typeface="Courier New" pitchFamily="34" charset="0"/>
                 <a:ea typeface="Courier New" pitchFamily="34" charset="-122"/>
                 <a:cs typeface="Courier New" pitchFamily="34" charset="-120"/>
               </a:rPr>
-              <a:t>0.92</a:t>
+              <a:t>0.80</a:t>
             </a:r>
             <a:endParaRPr lang="en-US" sz="1100" dirty="0"/>
           </a:p>
@@ -4411,7 +4412,7 @@
         </p:nvSpPr>
         <p:spPr>
           <a:xfrm>
-            <a:off x="10424160" y="5010912"/>
+            <a:off x="10424160" y="4645152"/>
             <a:ext cx="1097280" cy="274320"/>
           </a:xfrm>
           <a:prstGeom prst="rect">
@@ -4436,7 +4437,7 @@
                 <a:ea typeface="Calibri" pitchFamily="34" charset="-122"/>
                 <a:cs typeface="Calibri" pitchFamily="34" charset="-120"/>
               </a:rPr>
-              <a:t>C2</a:t>
+              <a:t>SYN flood</a:t>
             </a:r>
             <a:endParaRPr lang="en-US" sz="950" dirty="0"/>
           </a:p>
@@ -4450,7 +4451,7 @@
         </p:nvSpPr>
         <p:spPr>
           <a:xfrm>
-            <a:off x="6675120" y="5431536"/>
+            <a:off x="6675120" y="4946904"/>
             <a:ext cx="2011680" cy="274320"/>
           </a:xfrm>
           <a:prstGeom prst="rect">
@@ -4475,7 +4476,7 @@
                 <a:ea typeface="Calibri" pitchFamily="34" charset="-122"/>
                 <a:cs typeface="Calibri" pitchFamily="34" charset="-120"/>
               </a:rPr>
-              <a:t>outbound byte ratio</a:t>
+              <a:t>beacon regularity</a:t>
             </a:r>
             <a:endParaRPr lang="en-US" sz="1050" dirty="0"/>
           </a:p>
@@ -4489,7 +4490,7 @@
         </p:nvSpPr>
         <p:spPr>
           <a:xfrm>
-            <a:off x="8732520" y="5431536"/>
+            <a:off x="8732520" y="4946904"/>
             <a:ext cx="731520" cy="274320"/>
           </a:xfrm>
           <a:prstGeom prst="rect">
@@ -4514,7 +4515,7 @@
                 <a:ea typeface="Courier New" pitchFamily="34" charset="-122"/>
                 <a:cs typeface="Courier New" pitchFamily="34" charset="-120"/>
               </a:rPr>
-              <a:t>0.01</a:t>
+              <a:t>0.66</a:t>
             </a:r>
             <a:endParaRPr lang="en-US" sz="1100" dirty="0"/>
           </a:p>
@@ -4528,7 +4529,7 @@
         </p:nvSpPr>
         <p:spPr>
           <a:xfrm>
-            <a:off x="9555480" y="5431536"/>
+            <a:off x="9555480" y="4946904"/>
             <a:ext cx="731520" cy="274320"/>
           </a:xfrm>
           <a:prstGeom prst="rect">
@@ -4547,13 +4548,13 @@
             <a:r>
               <a:rPr lang="en-US" sz="1100" b="1" dirty="0">
                 <a:solidFill>
-                  <a:srgbClr val="F85149"/>
+                  <a:srgbClr val="BC8CFF"/>
                 </a:solidFill>
                 <a:latin typeface="Courier New" pitchFamily="34" charset="0"/>
                 <a:ea typeface="Courier New" pitchFamily="34" charset="-122"/>
                 <a:cs typeface="Courier New" pitchFamily="34" charset="-120"/>
               </a:rPr>
-              <a:t>0.52</a:t>
+              <a:t>0.92</a:t>
             </a:r>
             <a:endParaRPr lang="en-US" sz="1100" dirty="0"/>
           </a:p>
@@ -4567,7 +4568,7 @@
         </p:nvSpPr>
         <p:spPr>
           <a:xfrm>
-            <a:off x="10424160" y="5431536"/>
+            <a:off x="10424160" y="4946904"/>
             <a:ext cx="1097280" cy="274320"/>
           </a:xfrm>
           <a:prstGeom prst="rect">
@@ -4592,7 +4593,7 @@
                 <a:ea typeface="Calibri" pitchFamily="34" charset="-122"/>
                 <a:cs typeface="Calibri" pitchFamily="34" charset="-120"/>
               </a:rPr>
-              <a:t>Exfiltration</a:t>
+              <a:t>C2 beacon</a:t>
             </a:r>
             <a:endParaRPr lang="en-US" sz="950" dirty="0"/>
           </a:p>
@@ -4606,8 +4607,8 @@
         </p:nvSpPr>
         <p:spPr>
           <a:xfrm>
-            <a:off x="6675120" y="5815584"/>
-            <a:ext cx="4617720" cy="420624"/>
+            <a:off x="6675120" y="5248656"/>
+            <a:ext cx="2011680" cy="274320"/>
           </a:xfrm>
           <a:prstGeom prst="rect">
             <a:avLst/>
@@ -4623,7 +4624,124 @@
               <a:buNone/>
             </a:pPr>
             <a:r>
-              <a:rPr lang="en-US" sz="1000" i="1" dirty="0">
+              <a:rPr lang="en-US" sz="1050" dirty="0">
+                <a:solidFill>
+                  <a:srgbClr val="E6EDF3"/>
+                </a:solidFill>
+                <a:latin typeface="Calibri" pitchFamily="34" charset="0"/>
+                <a:ea typeface="Calibri" pitchFamily="34" charset="-122"/>
+                <a:cs typeface="Calibri" pitchFamily="34" charset="-120"/>
+              </a:rPr>
+              <a:t>DNS query size</a:t>
+            </a:r>
+            <a:endParaRPr lang="en-US" sz="1050" dirty="0"/>
+          </a:p>
+        </p:txBody>
+      </p:sp>
+      <p:sp>
+        <p:nvSpPr>
+          <p:cNvPr id="52" name="Text 50"/>
+          <p:cNvSpPr txBox="1"/>
+          <p:nvPr/>
+        </p:nvSpPr>
+        <p:spPr>
+          <a:xfrm>
+            <a:off x="8732520" y="5248656"/>
+            <a:ext cx="731520" cy="274320"/>
+          </a:xfrm>
+          <a:prstGeom prst="rect">
+            <a:avLst/>
+          </a:prstGeom>
+          <a:noFill/>
+          <a:ln/>
+        </p:spPr>
+        <p:txBody>
+          <a:bodyPr wrap="square" lIns="0" tIns="0" rIns="0" bIns="0" rtlCol="0" anchor="ctr"/>
+          <a:lstStyle/>
+          <a:p>
+            <a:pPr algn="r" indent="0" marL="0">
+              <a:buNone/>
+            </a:pPr>
+            <a:r>
+              <a:rPr lang="en-US" sz="1100" dirty="0">
+                <a:solidFill>
+                  <a:srgbClr val="8B98A8"/>
+                </a:solidFill>
+                <a:latin typeface="Courier New" pitchFamily="34" charset="0"/>
+                <a:ea typeface="Courier New" pitchFamily="34" charset="-122"/>
+                <a:cs typeface="Courier New" pitchFamily="34" charset="-120"/>
+              </a:rPr>
+              <a:t>4.29</a:t>
+            </a:r>
+            <a:endParaRPr lang="en-US" sz="1100" dirty="0"/>
+          </a:p>
+        </p:txBody>
+      </p:sp>
+      <p:sp>
+        <p:nvSpPr>
+          <p:cNvPr id="53" name="Text 51"/>
+          <p:cNvSpPr txBox="1"/>
+          <p:nvPr/>
+        </p:nvSpPr>
+        <p:spPr>
+          <a:xfrm>
+            <a:off x="9555480" y="5248656"/>
+            <a:ext cx="731520" cy="274320"/>
+          </a:xfrm>
+          <a:prstGeom prst="rect">
+            <a:avLst/>
+          </a:prstGeom>
+          <a:noFill/>
+          <a:ln/>
+        </p:spPr>
+        <p:txBody>
+          <a:bodyPr wrap="square" lIns="0" tIns="0" rIns="0" bIns="0" rtlCol="0" anchor="ctr"/>
+          <a:lstStyle/>
+          <a:p>
+            <a:pPr algn="r" indent="0" marL="0">
+              <a:buNone/>
+            </a:pPr>
+            <a:r>
+              <a:rPr lang="en-US" sz="1100" b="1" dirty="0">
+                <a:solidFill>
+                  <a:srgbClr val="3FB950"/>
+                </a:solidFill>
+                <a:latin typeface="Courier New" pitchFamily="34" charset="0"/>
+                <a:ea typeface="Courier New" pitchFamily="34" charset="-122"/>
+                <a:cs typeface="Courier New" pitchFamily="34" charset="-120"/>
+              </a:rPr>
+              <a:t>5.39</a:t>
+            </a:r>
+            <a:endParaRPr lang="en-US" sz="1100" dirty="0"/>
+          </a:p>
+        </p:txBody>
+      </p:sp>
+      <p:sp>
+        <p:nvSpPr>
+          <p:cNvPr id="54" name="Text 52"/>
+          <p:cNvSpPr txBox="1"/>
+          <p:nvPr/>
+        </p:nvSpPr>
+        <p:spPr>
+          <a:xfrm>
+            <a:off x="10424160" y="5248656"/>
+            <a:ext cx="1097280" cy="274320"/>
+          </a:xfrm>
+          <a:prstGeom prst="rect">
+            <a:avLst/>
+          </a:prstGeom>
+          <a:noFill/>
+          <a:ln/>
+        </p:spPr>
+        <p:txBody>
+          <a:bodyPr wrap="square" lIns="0" tIns="0" rIns="0" bIns="0" rtlCol="0" anchor="ctr"/>
+          <a:lstStyle/>
+          <a:p>
+            <a:pPr indent="0" marL="0">
+              <a:buNone/>
+            </a:pPr>
+            <a:r>
+              <a:rPr lang="en-US" sz="950" dirty="0">
                 <a:solidFill>
                   <a:srgbClr val="5B6776"/>
                 </a:solidFill>
@@ -4631,9 +4749,204 @@
                 <a:ea typeface="Calibri" pitchFamily="34" charset="-122"/>
                 <a:cs typeface="Calibri" pitchFamily="34" charset="-120"/>
               </a:rPr>
-              <a:t>A slow scan sits under every flow-level threshold. What gives it away is constant TTL, a constant tiny window, zero payload and a walk across ports — all of which aggregation destroys.</a:t>
-            </a:r>
-            <a:endParaRPr lang="en-US" sz="1000" dirty="0"/>
+              <a:t>DNS tunnel</a:t>
+            </a:r>
+            <a:endParaRPr lang="en-US" sz="950" dirty="0"/>
+          </a:p>
+        </p:txBody>
+      </p:sp>
+      <p:sp>
+        <p:nvSpPr>
+          <p:cNvPr id="55" name="Text 53"/>
+          <p:cNvSpPr txBox="1"/>
+          <p:nvPr/>
+        </p:nvSpPr>
+        <p:spPr>
+          <a:xfrm>
+            <a:off x="6675120" y="5550408"/>
+            <a:ext cx="2011680" cy="274320"/>
+          </a:xfrm>
+          <a:prstGeom prst="rect">
+            <a:avLst/>
+          </a:prstGeom>
+          <a:noFill/>
+          <a:ln/>
+        </p:spPr>
+        <p:txBody>
+          <a:bodyPr wrap="square" lIns="0" tIns="0" rIns="0" bIns="0" rtlCol="0" anchor="ctr"/>
+          <a:lstStyle/>
+          <a:p>
+            <a:pPr indent="0" marL="0">
+              <a:buNone/>
+            </a:pPr>
+            <a:r>
+              <a:rPr lang="en-US" sz="1050" dirty="0">
+                <a:solidFill>
+                  <a:srgbClr val="E6EDF3"/>
+                </a:solidFill>
+                <a:latin typeface="Calibri" pitchFamily="34" charset="0"/>
+                <a:ea typeface="Calibri" pitchFamily="34" charset="-122"/>
+                <a:cs typeface="Calibri" pitchFamily="34" charset="-120"/>
+              </a:rPr>
+              <a:t>TTL inconsistency</a:t>
+            </a:r>
+            <a:endParaRPr lang="en-US" sz="1050" dirty="0"/>
+          </a:p>
+        </p:txBody>
+      </p:sp>
+      <p:sp>
+        <p:nvSpPr>
+          <p:cNvPr id="56" name="Text 54"/>
+          <p:cNvSpPr txBox="1"/>
+          <p:nvPr/>
+        </p:nvSpPr>
+        <p:spPr>
+          <a:xfrm>
+            <a:off x="8732520" y="5550408"/>
+            <a:ext cx="731520" cy="274320"/>
+          </a:xfrm>
+          <a:prstGeom prst="rect">
+            <a:avLst/>
+          </a:prstGeom>
+          <a:noFill/>
+          <a:ln/>
+        </p:spPr>
+        <p:txBody>
+          <a:bodyPr wrap="square" lIns="0" tIns="0" rIns="0" bIns="0" rtlCol="0" anchor="ctr"/>
+          <a:lstStyle/>
+          <a:p>
+            <a:pPr algn="r" indent="0" marL="0">
+              <a:buNone/>
+            </a:pPr>
+            <a:r>
+              <a:rPr lang="en-US" sz="1100" dirty="0">
+                <a:solidFill>
+                  <a:srgbClr val="8B98A8"/>
+                </a:solidFill>
+                <a:latin typeface="Courier New" pitchFamily="34" charset="0"/>
+                <a:ea typeface="Courier New" pitchFamily="34" charset="-122"/>
+                <a:cs typeface="Courier New" pitchFamily="34" charset="-120"/>
+              </a:rPr>
+              <a:t>0.001</a:t>
+            </a:r>
+            <a:endParaRPr lang="en-US" sz="1100" dirty="0"/>
+          </a:p>
+        </p:txBody>
+      </p:sp>
+      <p:sp>
+        <p:nvSpPr>
+          <p:cNvPr id="57" name="Text 55"/>
+          <p:cNvSpPr txBox="1"/>
+          <p:nvPr/>
+        </p:nvSpPr>
+        <p:spPr>
+          <a:xfrm>
+            <a:off x="9555480" y="5550408"/>
+            <a:ext cx="731520" cy="274320"/>
+          </a:xfrm>
+          <a:prstGeom prst="rect">
+            <a:avLst/>
+          </a:prstGeom>
+          <a:noFill/>
+          <a:ln/>
+        </p:spPr>
+        <p:txBody>
+          <a:bodyPr wrap="square" lIns="0" tIns="0" rIns="0" bIns="0" rtlCol="0" anchor="ctr"/>
+          <a:lstStyle/>
+          <a:p>
+            <a:pPr algn="r" indent="0" marL="0">
+              <a:buNone/>
+            </a:pPr>
+            <a:r>
+              <a:rPr lang="en-US" sz="1100" b="1" dirty="0">
+                <a:solidFill>
+                  <a:srgbClr val="D29922"/>
+                </a:solidFill>
+                <a:latin typeface="Courier New" pitchFamily="34" charset="0"/>
+                <a:ea typeface="Courier New" pitchFamily="34" charset="-122"/>
+                <a:cs typeface="Courier New" pitchFamily="34" charset="-120"/>
+              </a:rPr>
+              <a:t>0.104</a:t>
+            </a:r>
+            <a:endParaRPr lang="en-US" sz="1100" dirty="0"/>
+          </a:p>
+        </p:txBody>
+      </p:sp>
+      <p:sp>
+        <p:nvSpPr>
+          <p:cNvPr id="58" name="Text 56"/>
+          <p:cNvSpPr txBox="1"/>
+          <p:nvPr/>
+        </p:nvSpPr>
+        <p:spPr>
+          <a:xfrm>
+            <a:off x="10424160" y="5550408"/>
+            <a:ext cx="1097280" cy="274320"/>
+          </a:xfrm>
+          <a:prstGeom prst="rect">
+            <a:avLst/>
+          </a:prstGeom>
+          <a:noFill/>
+          <a:ln/>
+        </p:spPr>
+        <p:txBody>
+          <a:bodyPr wrap="square" lIns="0" tIns="0" rIns="0" bIns="0" rtlCol="0" anchor="ctr"/>
+          <a:lstStyle/>
+          <a:p>
+            <a:pPr indent="0" marL="0">
+              <a:buNone/>
+            </a:pPr>
+            <a:r>
+              <a:rPr lang="en-US" sz="950" dirty="0">
+                <a:solidFill>
+                  <a:srgbClr val="5B6776"/>
+                </a:solidFill>
+                <a:latin typeface="Calibri" pitchFamily="34" charset="0"/>
+                <a:ea typeface="Calibri" pitchFamily="34" charset="-122"/>
+                <a:cs typeface="Calibri" pitchFamily="34" charset="-120"/>
+              </a:rPr>
+              <a:t>MitM</a:t>
+            </a:r>
+            <a:endParaRPr lang="en-US" sz="950" dirty="0"/>
+          </a:p>
+        </p:txBody>
+      </p:sp>
+      <p:sp>
+        <p:nvSpPr>
+          <p:cNvPr id="59" name="Text 57"/>
+          <p:cNvSpPr txBox="1"/>
+          <p:nvPr/>
+        </p:nvSpPr>
+        <p:spPr>
+          <a:xfrm>
+            <a:off x="6675120" y="5888736"/>
+            <a:ext cx="4617720" cy="365760"/>
+          </a:xfrm>
+          <a:prstGeom prst="rect">
+            <a:avLst/>
+          </a:prstGeom>
+          <a:noFill/>
+          <a:ln/>
+        </p:spPr>
+        <p:txBody>
+          <a:bodyPr wrap="square" lIns="0" tIns="0" rIns="0" bIns="0" rtlCol="0" anchor="ctr"/>
+          <a:lstStyle/>
+          <a:p>
+            <a:pPr indent="0" marL="0">
+              <a:buNone/>
+            </a:pPr>
+            <a:r>
+              <a:rPr lang="en-US" sz="900" i="1" dirty="0">
+                <a:solidFill>
+                  <a:srgbClr val="5B6776"/>
+                </a:solidFill>
+                <a:latin typeface="Calibri" pitchFamily="34" charset="0"/>
+                <a:ea typeface="Calibri" pitchFamily="34" charset="-122"/>
+                <a:cs typeface="Calibri" pitchFamily="34" charset="-120"/>
+              </a:rPr>
+              <a:t>Of the 18 attacks in our taxonomy, 9 are modelled as stages with generated training data, 6 are caught through their consequences, and 3 need a different sensor — and we say which.</a:t>
+            </a:r>
+            <a:endParaRPr lang="en-US" sz="900" dirty="0"/>
           </a:p>
         </p:txBody>
       </p:sp>
@@ -6057,8 +6370,8 @@
         </p:nvSpPr>
         <p:spPr>
           <a:xfrm>
-            <a:off x="9829800" y="2139696"/>
-            <a:ext cx="1554480" cy="548640"/>
+            <a:off x="9784080" y="2139696"/>
+            <a:ext cx="1645920" cy="548640"/>
           </a:xfrm>
           <a:prstGeom prst="rect">
             <a:avLst/>
@@ -6082,7 +6395,7 @@
                 <a:ea typeface="Calibri" pitchFamily="34" charset="-122"/>
                 <a:cs typeface="Calibri" pitchFamily="34" charset="-120"/>
               </a:rPr>
-              <a:t>vs 0.112</a:t>
+              <a:t>vs 0.166</a:t>
             </a:r>
             <a:endParaRPr lang="en-US" sz="1100" dirty="0"/>
           </a:p>
@@ -6099,7 +6412,7 @@
                 <a:ea typeface="Calibri" pitchFamily="34" charset="-122"/>
                 <a:cs typeface="Calibri" pitchFamily="34" charset="-120"/>
               </a:rPr>
-              <a:t>logreg (context)</a:t>
+              <a:t>snapshot classifier</a:t>
             </a:r>
             <a:endParaRPr lang="en-US" sz="1100" dirty="0"/>
           </a:p>
@@ -6246,7 +6559,7 @@
         <p:spPr>
           <a:xfrm>
             <a:off x="7909560" y="4224528"/>
-            <a:ext cx="1956816" cy="219456"/>
+            <a:ext cx="2084832" cy="219456"/>
           </a:xfrm>
           <a:prstGeom prst="roundRect">
             <a:avLst>
@@ -6297,7 +6610,7 @@
                 <a:ea typeface="Courier New" pitchFamily="34" charset="-122"/>
                 <a:cs typeface="Courier New" pitchFamily="34" charset="-120"/>
               </a:rPr>
-              <a:t>0.868  world model</a:t>
+              <a:t>0.611  world model</a:t>
             </a:r>
             <a:endParaRPr lang="en-US" sz="950" dirty="0"/>
           </a:p>
@@ -6336,7 +6649,7 @@
                 <a:ea typeface="Courier New" pitchFamily="34" charset="-122"/>
                 <a:cs typeface="Courier New" pitchFamily="34" charset="-120"/>
               </a:rPr>
-              <a:t>1.520  persistence</a:t>
+              <a:t>1.006  persistence</a:t>
             </a:r>
             <a:endParaRPr lang="en-US" sz="950" dirty="0"/>
           </a:p>
@@ -6402,7 +6715,7 @@
                 <a:ea typeface="Calibri" pitchFamily="34" charset="-122"/>
                 <a:cs typeface="Calibri" pitchFamily="34" charset="-120"/>
               </a:rPr>
-              <a:t>The margin widens the further ahead it forecasts — which is the whole claim</a:t>
+              <a:t>It leads at every horizon step, and halves the false-positive rate</a:t>
             </a:r>
             <a:endParaRPr lang="en-US" sz="1400" dirty="0"/>
           </a:p>
@@ -6441,7 +6754,7 @@
                 <a:ea typeface="Calibri" pitchFamily="34" charset="-122"/>
                 <a:cs typeface="Calibri" pitchFamily="34" charset="-120"/>
               </a:rPr>
-              <a:t>At one window ahead the world model beats the strongest logistic baseline by 0.019 F1. At five windows ahead the gap is 0.037, and the false-positive rate gap is 0.183 against 0.233. A static classifier has nothing to extrapolate from; a learned transition model does. Verified end to end on an unseen capture: 80% exact stage match and the Recon → Initial Access → Lateral Movement ordering recovered, including the slow scan.</a:t>
+              <a:t>The world model leads at every step, and it more than halves the false-positive rate of the snapshot classifier the problem statement criticises — 0.071 against 0.166. A static classifier has nothing to extrapolate from; a learned transition model does. The weakest class is Impact, F1 0.500 on 32 test windows: too rare in this corpus to learn well, and reported rather than hidden.</a:t>
             </a:r>
             <a:endParaRPr lang="en-US" sz="1100" dirty="0"/>
           </a:p>
